--- a/index/designs/y8-l8/l6-adverbs-danshi/l6-adverbs-danshi.pptx
+++ b/index/designs/y8-l8/l6-adverbs-danshi/l6-adverbs-danshi.pptx
@@ -2810,12 +2810,6 @@
               </a:rPr>
               <a:t>他常常打篮球。 </a:t>
             </a:r>
-            <a:pPr algn="l" indent="0" marL="0">
-              <a:spcBef>
-                <a:spcPts val="400"/>
-              </a:spcBef>
-              <a:buNone/>
-            </a:pPr>
             <a:r>
               <a:rPr lang="en-US" sz="1800" b="1" dirty="0">
                 <a:solidFill>
@@ -3977,12 +3971,6 @@
               </a:rPr>
               <a:t>You'll receive </a:t>
             </a:r>
-            <a:pPr algn="l" indent="0" marL="0">
-              <a:lnSpc>
-                <a:spcPts val="1680"/>
-              </a:lnSpc>
-              <a:buNone/>
-            </a:pPr>
             <a:r>
               <a:rPr lang="en-US" sz="1200" b="1" dirty="0">
                 <a:solidFill>
@@ -3994,12 +3982,6 @@
               </a:rPr>
               <a:t>3 experience checklists</a:t>
             </a:r>
-            <a:pPr algn="l" indent="0" marL="0">
-              <a:lnSpc>
-                <a:spcPts val="1680"/>
-              </a:lnSpc>
-              <a:buNone/>
-            </a:pPr>
             <a:r>
               <a:rPr lang="en-US" sz="1200" dirty="0">
                 <a:solidFill>
@@ -4032,12 +4014,6 @@
               </a:rPr>
               <a:t>Write a sentence for each checklist using </a:t>
             </a:r>
-            <a:pPr algn="l" indent="0" marL="0">
-              <a:lnSpc>
-                <a:spcPts val="1680"/>
-              </a:lnSpc>
-              <a:buNone/>
-            </a:pPr>
             <a:r>
               <a:rPr lang="en-US" sz="1200" b="1" dirty="0">
                 <a:solidFill>
@@ -5184,12 +5160,6 @@
               </a:rPr>
               <a:t>In pairs, work through the </a:t>
             </a:r>
-            <a:pPr algn="l" indent="0" marL="0">
-              <a:lnSpc>
-                <a:spcPts val="1680"/>
-              </a:lnSpc>
-              <a:buNone/>
-            </a:pPr>
             <a:r>
               <a:rPr lang="en-US" sz="1200" b="1" dirty="0">
                 <a:solidFill>
@@ -5243,12 +5213,6 @@
               </a:rPr>
               <a:t>Questions cover school and hobbies from across </a:t>
             </a:r>
-            <a:pPr algn="l" indent="0" marL="0">
-              <a:lnSpc>
-                <a:spcPts val="1680"/>
-              </a:lnSpc>
-              <a:buNone/>
-            </a:pPr>
             <a:r>
               <a:rPr lang="en-US" sz="1200" b="1" dirty="0">
                 <a:solidFill>
@@ -5748,12 +5712,6 @@
               </a:rPr>
               <a:t>Materials:</a:t>
             </a:r>
-            <a:pPr algn="l" indent="0" marL="0">
-              <a:spcBef>
-                <a:spcPts val="1000"/>
-              </a:spcBef>
-              <a:buNone/>
-            </a:pPr>
             <a:r>
               <a:rPr lang="en-US" sz="900" dirty="0">
                 <a:solidFill>
@@ -7580,12 +7538,6 @@
               </a:rPr>
               <a:t>Teacher gives an </a:t>
             </a:r>
-            <a:pPr algn="l" indent="0" marL="0">
-              <a:lnSpc>
-                <a:spcPts val="1680"/>
-              </a:lnSpc>
-              <a:buNone/>
-            </a:pPr>
             <a:r>
               <a:rPr lang="en-US" sz="1200" b="1" dirty="0">
                 <a:solidFill>
@@ -7597,12 +7549,6 @@
               </a:rPr>
               <a:t>English prompt</a:t>
             </a:r>
-            <a:pPr algn="l" indent="0" marL="0">
-              <a:lnSpc>
-                <a:spcPts val="1680"/>
-              </a:lnSpc>
-              <a:buNone/>
-            </a:pPr>
             <a:r>
               <a:rPr lang="en-US" sz="1200" dirty="0">
                 <a:solidFill>
@@ -7635,12 +7581,6 @@
               </a:rPr>
               <a:t>Students write the full </a:t>
             </a:r>
-            <a:pPr algn="l" indent="0" marL="0">
-              <a:lnSpc>
-                <a:spcPts val="1680"/>
-              </a:lnSpc>
-              <a:buNone/>
-            </a:pPr>
             <a:r>
               <a:rPr lang="en-US" sz="1200" b="1" dirty="0">
                 <a:solidFill>
@@ -7652,12 +7592,6 @@
               </a:rPr>
               <a:t>Chinese sentence</a:t>
             </a:r>
-            <a:pPr algn="l" indent="0" marL="0">
-              <a:lnSpc>
-                <a:spcPts val="1680"/>
-              </a:lnSpc>
-              <a:buNone/>
-            </a:pPr>
             <a:r>
               <a:rPr lang="en-US" sz="1200" dirty="0">
                 <a:solidFill>
@@ -7920,12 +7854,6 @@
               </a:rPr>
               <a:t>"You already know </a:t>
             </a:r>
-            <a:pPr algn="l" indent="0" marL="0">
-              <a:lnSpc>
-                <a:spcPts val="1800"/>
-              </a:lnSpc>
-              <a:buNone/>
-            </a:pPr>
             <a:r>
               <a:rPr lang="en-US" sz="1200" b="1" dirty="0">
                 <a:solidFill>
@@ -7937,12 +7865,6 @@
               </a:rPr>
               <a:t>但是</a:t>
             </a:r>
-            <a:pPr algn="l" indent="0" marL="0">
-              <a:lnSpc>
-                <a:spcPts val="1800"/>
-              </a:lnSpc>
-              <a:buNone/>
-            </a:pPr>
             <a:r>
               <a:rPr lang="en-US" sz="1200" dirty="0">
                 <a:solidFill>
@@ -7954,12 +7876,6 @@
               </a:rPr>
               <a:t> for contrasting likes. Today you'll use it for a new purpose — contrasting places you have and haven't been — and nail down exactly where frequency words like </a:t>
             </a:r>
-            <a:pPr algn="l" indent="0" marL="0">
-              <a:lnSpc>
-                <a:spcPts val="1800"/>
-              </a:lnSpc>
-              <a:buNone/>
-            </a:pPr>
             <a:r>
               <a:rPr lang="en-US" sz="1200" b="1" dirty="0">
                 <a:solidFill>
@@ -7971,12 +7887,6 @@
               </a:rPr>
               <a:t>经常</a:t>
             </a:r>
-            <a:pPr algn="l" indent="0" marL="0">
-              <a:lnSpc>
-                <a:spcPts val="1800"/>
-              </a:lnSpc>
-              <a:buNone/>
-            </a:pPr>
             <a:r>
               <a:rPr lang="en-US" sz="1200" dirty="0">
                 <a:solidFill>
@@ -7988,12 +7898,6 @@
               </a:rPr>
               <a:t> and </a:t>
             </a:r>
-            <a:pPr algn="l" indent="0" marL="0">
-              <a:lnSpc>
-                <a:spcPts val="1800"/>
-              </a:lnSpc>
-              <a:buNone/>
-            </a:pPr>
             <a:r>
               <a:rPr lang="en-US" sz="1200" b="1" dirty="0">
                 <a:solidFill>
@@ -8005,12 +7909,6 @@
               </a:rPr>
               <a:t>常常</a:t>
             </a:r>
-            <a:pPr algn="l" indent="0" marL="0">
-              <a:lnSpc>
-                <a:spcPts val="1800"/>
-              </a:lnSpc>
-              <a:buNone/>
-            </a:pPr>
             <a:r>
               <a:rPr lang="en-US" sz="1200" dirty="0">
                 <a:solidFill>
@@ -8407,12 +8305,6 @@
               </a:rPr>
               <a:t>We are learning to correctly place frequency adverbs (</a:t>
             </a:r>
-            <a:pPr algn="l" indent="0" marL="0">
-              <a:spcBef>
-                <a:spcPts val="400"/>
-              </a:spcBef>
-              <a:buNone/>
-            </a:pPr>
             <a:r>
               <a:rPr lang="en-US" sz="1400" b="1" dirty="0">
                 <a:solidFill>
@@ -8424,12 +8316,6 @@
               </a:rPr>
               <a:t>经常/常常/差不多</a:t>
             </a:r>
-            <a:pPr algn="l" indent="0" marL="0">
-              <a:spcBef>
-                <a:spcPts val="400"/>
-              </a:spcBef>
-              <a:buNone/>
-            </a:pPr>
             <a:r>
               <a:rPr lang="en-US" sz="1400" dirty="0">
                 <a:solidFill>
@@ -8441,12 +8327,6 @@
               </a:rPr>
               <a:t>) before the verb, and use </a:t>
             </a:r>
-            <a:pPr algn="l" indent="0" marL="0">
-              <a:spcBef>
-                <a:spcPts val="400"/>
-              </a:spcBef>
-              <a:buNone/>
-            </a:pPr>
             <a:r>
               <a:rPr lang="en-US" sz="1400" b="1" dirty="0">
                 <a:solidFill>
@@ -8458,12 +8338,6 @@
               </a:rPr>
               <a:t>但是</a:t>
             </a:r>
-            <a:pPr algn="l" indent="0" marL="0">
-              <a:spcBef>
-                <a:spcPts val="400"/>
-              </a:spcBef>
-              <a:buNone/>
-            </a:pPr>
             <a:r>
               <a:rPr lang="en-US" sz="1400" dirty="0">
                 <a:solidFill>
@@ -8590,12 +8464,6 @@
               </a:rPr>
               <a:t>I can say </a:t>
             </a:r>
-            <a:pPr algn="l" indent="0" marL="0">
-              <a:lnSpc>
-                <a:spcPts val="1680"/>
-              </a:lnSpc>
-              <a:buNone/>
-            </a:pPr>
             <a:r>
               <a:rPr lang="en-US" sz="1200" dirty="0">
                 <a:solidFill>
@@ -8607,12 +8475,6 @@
               </a:rPr>
               <a:t>经常</a:t>
             </a:r>
-            <a:pPr algn="l" indent="0" marL="0">
-              <a:lnSpc>
-                <a:spcPts val="1680"/>
-              </a:lnSpc>
-              <a:buNone/>
-            </a:pPr>
             <a:r>
               <a:rPr lang="en-US" sz="1200" dirty="0">
                 <a:solidFill>
@@ -8624,12 +8486,6 @@
               </a:rPr>
               <a:t> and </a:t>
             </a:r>
-            <a:pPr algn="l" indent="0" marL="0">
-              <a:lnSpc>
-                <a:spcPts val="1680"/>
-              </a:lnSpc>
-              <a:buNone/>
-            </a:pPr>
             <a:r>
               <a:rPr lang="en-US" sz="1200" dirty="0">
                 <a:solidFill>
@@ -8641,12 +8497,6 @@
               </a:rPr>
               <a:t>常常</a:t>
             </a:r>
-            <a:pPr algn="l" indent="0" marL="0">
-              <a:lnSpc>
-                <a:spcPts val="1680"/>
-              </a:lnSpc>
-              <a:buNone/>
-            </a:pPr>
             <a:r>
               <a:rPr lang="en-US" sz="1200" dirty="0">
                 <a:solidFill>
@@ -8658,12 +8508,6 @@
               </a:rPr>
               <a:t> and place them </a:t>
             </a:r>
-            <a:pPr algn="l" indent="0" marL="0">
-              <a:lnSpc>
-                <a:spcPts val="1680"/>
-              </a:lnSpc>
-              <a:buNone/>
-            </a:pPr>
             <a:r>
               <a:rPr lang="en-US" sz="1200" b="1" dirty="0">
                 <a:solidFill>
@@ -8675,12 +8519,6 @@
               </a:rPr>
               <a:t>correctly before the verb</a:t>
             </a:r>
-            <a:pPr algn="l" indent="0" marL="0">
-              <a:lnSpc>
-                <a:spcPts val="1680"/>
-              </a:lnSpc>
-              <a:buNone/>
-            </a:pPr>
             <a:r>
               <a:rPr lang="en-US" sz="1200" dirty="0">
                 <a:solidFill>
@@ -8807,12 +8645,6 @@
               </a:rPr>
               <a:t>I can rewrite a </a:t>
             </a:r>
-            <a:pPr algn="l" indent="0" marL="0">
-              <a:lnSpc>
-                <a:spcPts val="1680"/>
-              </a:lnSpc>
-              <a:buNone/>
-            </a:pPr>
             <a:r>
               <a:rPr lang="en-US" sz="1200" dirty="0">
                 <a:solidFill>
@@ -8824,12 +8656,6 @@
               </a:rPr>
               <a:t>常常</a:t>
             </a:r>
-            <a:pPr algn="l" indent="0" marL="0">
-              <a:lnSpc>
-                <a:spcPts val="1680"/>
-              </a:lnSpc>
-              <a:buNone/>
-            </a:pPr>
             <a:r>
               <a:rPr lang="en-US" sz="1200" dirty="0">
                 <a:solidFill>
@@ -8841,12 +8667,6 @@
               </a:rPr>
               <a:t> sentence as a </a:t>
             </a:r>
-            <a:pPr algn="l" indent="0" marL="0">
-              <a:lnSpc>
-                <a:spcPts val="1680"/>
-              </a:lnSpc>
-              <a:buNone/>
-            </a:pPr>
             <a:r>
               <a:rPr lang="en-US" sz="1200" dirty="0">
                 <a:solidFill>
@@ -8858,12 +8678,6 @@
               </a:rPr>
               <a:t>差不多每天都</a:t>
             </a:r>
-            <a:pPr algn="l" indent="0" marL="0">
-              <a:lnSpc>
-                <a:spcPts val="1680"/>
-              </a:lnSpc>
-              <a:buNone/>
-            </a:pPr>
             <a:r>
               <a:rPr lang="en-US" sz="1200" dirty="0">
                 <a:solidFill>
@@ -8990,12 +8804,6 @@
               </a:rPr>
               <a:t>I can make a </a:t>
             </a:r>
-            <a:pPr algn="l" indent="0" marL="0">
-              <a:lnSpc>
-                <a:spcPts val="1680"/>
-              </a:lnSpc>
-              <a:buNone/>
-            </a:pPr>
             <a:r>
               <a:rPr lang="en-US" sz="1200" b="1" dirty="0">
                 <a:solidFill>
@@ -9007,12 +8815,6 @@
               </a:rPr>
               <a:t>但是</a:t>
             </a:r>
-            <a:pPr algn="l" indent="0" marL="0">
-              <a:lnSpc>
-                <a:spcPts val="1680"/>
-              </a:lnSpc>
-              <a:buNone/>
-            </a:pPr>
             <a:r>
               <a:rPr lang="en-US" sz="1200" dirty="0">
                 <a:solidFill>
@@ -9024,12 +8826,6 @@
               </a:rPr>
               <a:t> sentence about places I have and haven't been — </a:t>
             </a:r>
-            <a:pPr algn="l" indent="0" marL="0">
-              <a:lnSpc>
-                <a:spcPts val="1680"/>
-              </a:lnSpc>
-              <a:buNone/>
-            </a:pPr>
             <a:r>
               <a:rPr lang="en-US" sz="1200" dirty="0">
                 <a:solidFill>
@@ -10782,9 +10578,6 @@
               </a:rPr>
               <a:t>The adverb sits </a:t>
             </a:r>
-            <a:pPr algn="l" indent="0" marL="0">
-              <a:buNone/>
-            </a:pPr>
             <a:r>
               <a:rPr lang="en-US" sz="1000" b="1" dirty="0">
                 <a:solidFill>
@@ -10796,9 +10589,6 @@
               </a:rPr>
               <a:t>directly before the verb</a:t>
             </a:r>
-            <a:pPr algn="l" indent="0" marL="0">
-              <a:buNone/>
-            </a:pPr>
             <a:r>
               <a:rPr lang="en-US" sz="1000" dirty="0">
                 <a:solidFill>
@@ -11116,9 +10906,6 @@
               </a:rPr>
               <a:t>去过</a:t>
             </a:r>
-            <a:pPr algn="l" indent="0" marL="0">
-              <a:buNone/>
-            </a:pPr>
             <a:r>
               <a:rPr lang="en-US" sz="1000" dirty="0">
                 <a:solidFill>
@@ -11423,12 +11210,6 @@
               </a:rPr>
               <a:t>Write your answer on your mini whiteboard </a:t>
             </a:r>
-            <a:pPr algn="l" indent="0" marL="0">
-              <a:spcBef>
-                <a:spcPts val="400"/>
-              </a:spcBef>
-              <a:buNone/>
-            </a:pPr>
             <a:r>
               <a:rPr lang="en-US" sz="900" b="1" dirty="0">
                 <a:solidFill>
@@ -11586,9 +11367,6 @@
               </a:rPr>
               <a:t>Error check: </a:t>
             </a:r>
-            <a:pPr algn="l" indent="0" marL="0">
-              <a:buNone/>
-            </a:pPr>
             <a:r>
               <a:rPr lang="en-US" sz="1500" b="1" dirty="0">
                 <a:solidFill>
@@ -11600,9 +11378,6 @@
               </a:rPr>
               <a:t>我看电影经常。</a:t>
             </a:r>
-            <a:pPr algn="l" indent="0" marL="0">
-              <a:buNone/>
-            </a:pPr>
             <a:r>
               <a:rPr lang="en-US" sz="1300" dirty="0">
                 <a:solidFill>
@@ -11760,9 +11535,6 @@
               </a:rPr>
               <a:t>Quick translate: "I often play tennis." </a:t>
             </a:r>
-            <a:pPr algn="l" indent="0" marL="0">
-              <a:buNone/>
-            </a:pPr>
             <a:r>
               <a:rPr lang="en-US" sz="1300" i="1" dirty="0">
                 <a:solidFill>
@@ -11920,9 +11692,6 @@
               </a:rPr>
               <a:t>Thumbs up if </a:t>
             </a:r>
-            <a:pPr algn="l" indent="0" marL="0">
-              <a:buNone/>
-            </a:pPr>
             <a:r>
               <a:rPr lang="en-US" sz="1400" b="1" dirty="0">
                 <a:solidFill>
@@ -11934,9 +11703,6 @@
               </a:rPr>
               <a:t>差不多每天都</a:t>
             </a:r>
-            <a:pPr algn="l" indent="0" marL="0">
-              <a:buNone/>
-            </a:pPr>
             <a:r>
               <a:rPr lang="en-US" sz="1300" dirty="0">
                 <a:solidFill>
@@ -11948,9 +11714,6 @@
               </a:rPr>
               <a:t> means the same thing as </a:t>
             </a:r>
-            <a:pPr algn="l" indent="0" marL="0">
-              <a:buNone/>
-            </a:pPr>
             <a:r>
               <a:rPr lang="en-US" sz="1400" b="1" dirty="0">
                 <a:solidFill>
@@ -11962,9 +11725,6 @@
               </a:rPr>
               <a:t>常常</a:t>
             </a:r>
-            <a:pPr algn="l" indent="0" marL="0">
-              <a:buNone/>
-            </a:pPr>
             <a:r>
               <a:rPr lang="en-US" sz="1300" dirty="0">
                 <a:solidFill>
@@ -13493,9 +13253,6 @@
               </a:rPr>
               <a:t>Correct → </a:t>
             </a:r>
-            <a:pPr algn="l" indent="0" marL="0">
-              <a:buNone/>
-            </a:pPr>
             <a:r>
               <a:rPr lang="en-US" sz="900" i="1" dirty="0">
                 <a:solidFill>
@@ -13685,9 +13442,6 @@
               </a:rPr>
               <a:t>Correct → </a:t>
             </a:r>
-            <a:pPr algn="l" indent="0" marL="0">
-              <a:buNone/>
-            </a:pPr>
             <a:r>
               <a:rPr lang="en-US" sz="900" i="1" dirty="0">
                 <a:solidFill>
@@ -13877,9 +13631,6 @@
               </a:rPr>
               <a:t>Correct → </a:t>
             </a:r>
-            <a:pPr algn="l" indent="0" marL="0">
-              <a:buNone/>
-            </a:pPr>
             <a:r>
               <a:rPr lang="en-US" sz="900" i="1" dirty="0">
                 <a:solidFill>
@@ -13962,9 +13713,6 @@
               </a:rPr>
               <a:t>Setup:</a:t>
             </a:r>
-            <a:pPr algn="l" indent="0" marL="0">
-              <a:buNone/>
-            </a:pPr>
             <a:r>
               <a:rPr lang="en-US" sz="1000" dirty="0">
                 <a:solidFill>
@@ -14482,9 +14230,6 @@
               </a:rPr>
               <a:t>我</a:t>
             </a:r>
-            <a:pPr algn="l" indent="0" marL="0">
-              <a:buNone/>
-            </a:pPr>
             <a:r>
               <a:rPr lang="en-US" sz="1800" b="1" dirty="0">
                 <a:solidFill>
@@ -14496,9 +14241,6 @@
               </a:rPr>
               <a:t>经常</a:t>
             </a:r>
-            <a:pPr algn="l" indent="0" marL="0">
-              <a:buNone/>
-            </a:pPr>
             <a:r>
               <a:rPr lang="en-US" sz="1800" dirty="0">
                 <a:solidFill>
@@ -14732,9 +14474,6 @@
               </a:rPr>
               <a:t>我</a:t>
             </a:r>
-            <a:pPr algn="l" indent="0" marL="0">
-              <a:buNone/>
-            </a:pPr>
             <a:r>
               <a:rPr lang="en-US" sz="1800" b="1" dirty="0">
                 <a:solidFill>
@@ -14746,9 +14485,6 @@
               </a:rPr>
               <a:t>常常</a:t>
             </a:r>
-            <a:pPr algn="l" indent="0" marL="0">
-              <a:buNone/>
-            </a:pPr>
             <a:r>
               <a:rPr lang="en-US" sz="1800" dirty="0">
                 <a:solidFill>
@@ -14982,9 +14718,6 @@
               </a:rPr>
               <a:t>我</a:t>
             </a:r>
-            <a:pPr algn="l" indent="0" marL="0">
-              <a:buNone/>
-            </a:pPr>
             <a:r>
               <a:rPr lang="en-US" sz="1800" b="1" dirty="0">
                 <a:solidFill>
@@ -14996,9 +14729,6 @@
               </a:rPr>
               <a:t>差不多每天都</a:t>
             </a:r>
-            <a:pPr algn="l" indent="0" marL="0">
-              <a:buNone/>
-            </a:pPr>
             <a:r>
               <a:rPr lang="en-US" sz="1800" dirty="0">
                 <a:solidFill>
